--- a/presentations/13-kids-move-and-catch/13-kids-move-and-catch-lecture.pptx
+++ b/presentations/13-kids-move-and-catch/13-kids-move-and-catch-lecture.pptx
@@ -138,7 +138,7 @@
   <p:extLst>
     <p:ext uri="{521415D9-36F7-43E2-AB2F-B90AF26B5E84}">
       <p14:sectionLst xmlns:p14="http://schemas.microsoft.com/office/powerpoint/2010/main">
-        <p14:section name="Opening" id="{c6701f2e-13cc-a8c8-c2cc-7466bae9e8c0}">
+        <p14:section name="Opening" id="{ff655a09-6b48-f707-192d-abe46d10217a}">
           <p14:sldIdLst>
             <p14:sldId id="256"/>
             <p14:sldId id="257"/>
@@ -146,7 +146,7 @@
             <p14:sldId id="259"/>
           </p14:sldIdLst>
         </p14:section>
-        <p14:section name="If" id="{4797594c-ac76-8cd8-6294-5fe524d101e9}">
+        <p14:section name="If" id="{c1839370-4679-e00c-372b-497b821d75fb}">
           <p14:sldIdLst>
             <p14:sldId id="260"/>
             <p14:sldId id="261"/>
@@ -155,7 +155,7 @@
             <p14:sldId id="264"/>
           </p14:sldIdLst>
         </p14:section>
-        <p14:section name="Change" id="{e10e29db-d07c-86cf-4b4a-c5f740963925}">
+        <p14:section name="Change" id="{9873780c-e265-e5b9-e20c-28088804b2bc}">
           <p14:sldIdLst>
             <p14:sldId id="265"/>
             <p14:sldId id="266"/>
@@ -165,7 +165,7 @@
             <p14:sldId id="270"/>
           </p14:sldIdLst>
         </p14:section>
-        <p14:section name="The fence" id="{24b5f0d2-a679-cd4f-3ce1-b9f50dd9151d}">
+        <p14:section name="The fence" id="{a23b50a5-2520-8248-ad30-06988ed67264}">
           <p14:sldIdLst>
             <p14:sldId id="271"/>
             <p14:sldId id="272"/>
@@ -174,13 +174,13 @@
             <p14:sldId id="275"/>
           </p14:sldIdLst>
         </p14:section>
-        <p14:section name="Slow motion" id="{931bda23-c744-4bb0-9650-afec20e6682c}">
+        <p14:section name="Slow motion" id="{7a6a1f3c-cc5d-bf05-a80c-0800bac7def2}">
           <p14:sldIdLst>
             <p14:sldId id="276"/>
             <p14:sldId id="277"/>
           </p14:sldIdLst>
         </p14:section>
-        <p14:section name="Lemon Catcher" id="{97ff2101-9a72-2959-1ccc-0595b895ea5c}">
+        <p14:section name="Lemon Catcher" id="{bd8d52c7-c063-7d4b-2e06-f222c0b1c528}">
           <p14:sldIdLst>
             <p14:sldId id="278"/>
             <p14:sldId id="279"/>
@@ -193,7 +193,7 @@
             <p14:sldId id="286"/>
           </p14:sldIdLst>
         </p14:section>
-        <p14:section name="Closing" id="{f99e8d61-9806-56c5-86bf-b64c0b9ee584}">
+        <p14:section name="Closing" id="{b5bfa63f-4fa1-38cb-105f-41cdf151b3d5}">
           <p14:sldIdLst>
             <p14:sldId id="287"/>
           </p14:sldIdLst>

--- a/presentations/13-kids-move-and-catch/13-kids-move-and-catch-lecture.pptx
+++ b/presentations/13-kids-move-and-catch/13-kids-move-and-catch-lecture.pptx
@@ -138,7 +138,7 @@
   <p:extLst>
     <p:ext uri="{521415D9-36F7-43E2-AB2F-B90AF26B5E84}">
       <p14:sectionLst xmlns:p14="http://schemas.microsoft.com/office/powerpoint/2010/main">
-        <p14:section name="Opening" id="{ff655a09-6b48-f707-192d-abe46d10217a}">
+        <p14:section name="Opening" id="{45f494e6-a54d-267c-1324-dd508832ff41}">
           <p14:sldIdLst>
             <p14:sldId id="256"/>
             <p14:sldId id="257"/>
@@ -146,7 +146,7 @@
             <p14:sldId id="259"/>
           </p14:sldIdLst>
         </p14:section>
-        <p14:section name="If" id="{c1839370-4679-e00c-372b-497b821d75fb}">
+        <p14:section name="If" id="{9ef8cf53-d9f7-3b12-701f-a3aeeeaa0ca6}">
           <p14:sldIdLst>
             <p14:sldId id="260"/>
             <p14:sldId id="261"/>
@@ -155,7 +155,7 @@
             <p14:sldId id="264"/>
           </p14:sldIdLst>
         </p14:section>
-        <p14:section name="Change" id="{9873780c-e265-e5b9-e20c-28088804b2bc}">
+        <p14:section name="Change" id="{de775386-3af9-059b-8989-8b236c7ef7c2}">
           <p14:sldIdLst>
             <p14:sldId id="265"/>
             <p14:sldId id="266"/>
@@ -165,7 +165,7 @@
             <p14:sldId id="270"/>
           </p14:sldIdLst>
         </p14:section>
-        <p14:section name="The fence" id="{a23b50a5-2520-8248-ad30-06988ed67264}">
+        <p14:section name="The fence" id="{549dcd96-3780-187d-7993-02b2c4f4e119}">
           <p14:sldIdLst>
             <p14:sldId id="271"/>
             <p14:sldId id="272"/>
@@ -174,13 +174,13 @@
             <p14:sldId id="275"/>
           </p14:sldIdLst>
         </p14:section>
-        <p14:section name="Slow motion" id="{7a6a1f3c-cc5d-bf05-a80c-0800bac7def2}">
+        <p14:section name="Slow motion" id="{52b42f0e-d45c-b890-c579-b851f2ac9254}">
           <p14:sldIdLst>
             <p14:sldId id="276"/>
             <p14:sldId id="277"/>
           </p14:sldIdLst>
         </p14:section>
-        <p14:section name="Lemon Catcher" id="{bd8d52c7-c063-7d4b-2e06-f222c0b1c528}">
+        <p14:section name="Lemon Catcher" id="{067cd726-b769-65e9-9c5e-ddabf210bdec}">
           <p14:sldIdLst>
             <p14:sldId id="278"/>
             <p14:sldId id="279"/>
@@ -193,7 +193,7 @@
             <p14:sldId id="286"/>
           </p14:sldIdLst>
         </p14:section>
-        <p14:section name="Closing" id="{b5bfa63f-4fa1-38cb-105f-41cdf151b3d5}">
+        <p14:section name="Closing" id="{f5f19e3c-6d83-df1b-87c4-4a68a41b9b6d}">
           <p14:sldIdLst>
             <p14:sldId id="287"/>
           </p14:sldIdLst>
@@ -6084,7 +6084,7 @@
           </a:ln>
         </p:spPr>
         <p:txBody>
-          <a:bodyPr wrap="square" lIns="0" tIns="127000" rIns="101600" bIns="0" rtlCol="0" anchor="ctr"/>
+          <a:bodyPr wrap="square" lIns="88900" tIns="88900" rIns="88900" bIns="88900" rtlCol="0" anchor="ctr"/>
           <a:lstStyle/>
           <a:p>
             <a:pPr algn="l" indent="0" marL="0">
@@ -6131,7 +6131,7 @@
           </a:ln>
         </p:spPr>
         <p:txBody>
-          <a:bodyPr wrap="square" lIns="0" tIns="127000" rIns="101600" bIns="0" rtlCol="0" anchor="ctr"/>
+          <a:bodyPr wrap="square" lIns="88900" tIns="88900" rIns="88900" bIns="88900" rtlCol="0" anchor="ctr"/>
           <a:lstStyle/>
           <a:p>
             <a:pPr algn="l" indent="0" marL="0">
@@ -6178,7 +6178,7 @@
           </a:ln>
         </p:spPr>
         <p:txBody>
-          <a:bodyPr wrap="square" lIns="0" tIns="127000" rIns="101600" bIns="0" rtlCol="0" anchor="ctr"/>
+          <a:bodyPr wrap="square" lIns="88900" tIns="88900" rIns="88900" bIns="88900" rtlCol="0" anchor="ctr"/>
           <a:lstStyle/>
           <a:p>
             <a:pPr algn="l" indent="0" marL="0">
@@ -6225,7 +6225,7 @@
           </a:ln>
         </p:spPr>
         <p:txBody>
-          <a:bodyPr wrap="square" lIns="0" tIns="127000" rIns="101600" bIns="0" rtlCol="0" anchor="ctr"/>
+          <a:bodyPr wrap="square" lIns="88900" tIns="88900" rIns="88900" bIns="88900" rtlCol="0" anchor="ctr"/>
           <a:lstStyle/>
           <a:p>
             <a:pPr algn="l" indent="0" marL="0">
@@ -6272,7 +6272,7 @@
           </a:ln>
         </p:spPr>
         <p:txBody>
-          <a:bodyPr wrap="square" lIns="0" tIns="127000" rIns="101600" bIns="0" rtlCol="0" anchor="ctr"/>
+          <a:bodyPr wrap="square" lIns="88900" tIns="88900" rIns="88900" bIns="88900" rtlCol="0" anchor="ctr"/>
           <a:lstStyle/>
           <a:p>
             <a:pPr algn="l" indent="0" marL="0">
@@ -8210,7 +8210,7 @@
           </a:ln>
         </p:spPr>
         <p:txBody>
-          <a:bodyPr wrap="square" lIns="0" tIns="127000" rIns="101600" bIns="0" rtlCol="0" anchor="ctr"/>
+          <a:bodyPr wrap="square" lIns="88900" tIns="88900" rIns="88900" bIns="88900" rtlCol="0" anchor="ctr"/>
           <a:lstStyle/>
           <a:p>
             <a:pPr algn="l" indent="0" marL="0">
@@ -12965,7 +12965,7 @@
           </a:ln>
         </p:spPr>
         <p:txBody>
-          <a:bodyPr wrap="square" lIns="0" tIns="127000" rIns="101600" bIns="0" rtlCol="0" anchor="ctr"/>
+          <a:bodyPr wrap="square" lIns="88900" tIns="88900" rIns="88900" bIns="88900" rtlCol="0" anchor="ctr"/>
           <a:lstStyle/>
           <a:p>
             <a:pPr algn="l" indent="0" marL="0">
@@ -13012,7 +13012,7 @@
           </a:ln>
         </p:spPr>
         <p:txBody>
-          <a:bodyPr wrap="square" lIns="0" tIns="127000" rIns="101600" bIns="0" rtlCol="0" anchor="ctr"/>
+          <a:bodyPr wrap="square" lIns="88900" tIns="88900" rIns="88900" bIns="88900" rtlCol="0" anchor="ctr"/>
           <a:lstStyle/>
           <a:p>
             <a:pPr algn="l" indent="0" marL="0">
@@ -13976,7 +13976,7 @@
           </a:ln>
         </p:spPr>
         <p:txBody>
-          <a:bodyPr wrap="square" lIns="0" tIns="127000" rIns="101600" bIns="0" rtlCol="0" anchor="ctr"/>
+          <a:bodyPr wrap="square" lIns="88900" tIns="88900" rIns="88900" bIns="88900" rtlCol="0" anchor="ctr"/>
           <a:lstStyle/>
           <a:p>
             <a:pPr algn="l" indent="0" marL="0">
@@ -14023,7 +14023,7 @@
           </a:ln>
         </p:spPr>
         <p:txBody>
-          <a:bodyPr wrap="square" lIns="0" tIns="127000" rIns="101600" bIns="0" rtlCol="0" anchor="ctr"/>
+          <a:bodyPr wrap="square" lIns="88900" tIns="88900" rIns="88900" bIns="88900" rtlCol="0" anchor="ctr"/>
           <a:lstStyle/>
           <a:p>
             <a:pPr algn="l" indent="0" marL="0">
@@ -14070,7 +14070,7 @@
           </a:ln>
         </p:spPr>
         <p:txBody>
-          <a:bodyPr wrap="square" lIns="0" tIns="127000" rIns="101600" bIns="0" rtlCol="0" anchor="ctr"/>
+          <a:bodyPr wrap="square" lIns="88900" tIns="88900" rIns="88900" bIns="88900" rtlCol="0" anchor="ctr"/>
           <a:lstStyle/>
           <a:p>
             <a:pPr algn="l" indent="0" marL="0">
@@ -14117,7 +14117,7 @@
           </a:ln>
         </p:spPr>
         <p:txBody>
-          <a:bodyPr wrap="square" lIns="0" tIns="127000" rIns="101600" bIns="0" rtlCol="0" anchor="ctr"/>
+          <a:bodyPr wrap="square" lIns="88900" tIns="88900" rIns="88900" bIns="88900" rtlCol="0" anchor="ctr"/>
           <a:lstStyle/>
           <a:p>
             <a:pPr algn="l" indent="0" marL="0">
@@ -16192,7 +16192,7 @@
           </a:ln>
         </p:spPr>
         <p:txBody>
-          <a:bodyPr wrap="square" lIns="0" tIns="127000" rIns="101600" bIns="0" rtlCol="0" anchor="ctr"/>
+          <a:bodyPr wrap="square" lIns="88900" tIns="88900" rIns="88900" bIns="88900" rtlCol="0" anchor="ctr"/>
           <a:lstStyle/>
           <a:p>
             <a:pPr algn="l" indent="0" marL="0">
@@ -16239,7 +16239,7 @@
           </a:ln>
         </p:spPr>
         <p:txBody>
-          <a:bodyPr wrap="square" lIns="0" tIns="127000" rIns="101600" bIns="0" rtlCol="0" anchor="ctr"/>
+          <a:bodyPr wrap="square" lIns="88900" tIns="88900" rIns="88900" bIns="88900" rtlCol="0" anchor="ctr"/>
           <a:lstStyle/>
           <a:p>
             <a:pPr algn="l" indent="0" marL="0">
@@ -16286,7 +16286,7 @@
           </a:ln>
         </p:spPr>
         <p:txBody>
-          <a:bodyPr wrap="square" lIns="0" tIns="127000" rIns="101600" bIns="0" rtlCol="0" anchor="ctr"/>
+          <a:bodyPr wrap="square" lIns="88900" tIns="88900" rIns="88900" bIns="88900" rtlCol="0" anchor="ctr"/>
           <a:lstStyle/>
           <a:p>
             <a:pPr algn="l" indent="0" marL="0">
@@ -16333,7 +16333,7 @@
           </a:ln>
         </p:spPr>
         <p:txBody>
-          <a:bodyPr wrap="square" lIns="0" tIns="127000" rIns="101600" bIns="0" rtlCol="0" anchor="ctr"/>
+          <a:bodyPr wrap="square" lIns="88900" tIns="88900" rIns="88900" bIns="88900" rtlCol="0" anchor="ctr"/>
           <a:lstStyle/>
           <a:p>
             <a:pPr algn="l" indent="0" marL="0">
@@ -18736,7 +18736,7 @@
           </a:ln>
         </p:spPr>
         <p:txBody>
-          <a:bodyPr wrap="square" lIns="0" tIns="127000" rIns="101600" bIns="0" rtlCol="0" anchor="ctr"/>
+          <a:bodyPr wrap="square" lIns="88900" tIns="88900" rIns="88900" bIns="88900" rtlCol="0" anchor="ctr"/>
           <a:lstStyle/>
           <a:p>
             <a:pPr algn="l" indent="0" marL="0">
@@ -18783,7 +18783,7 @@
           </a:ln>
         </p:spPr>
         <p:txBody>
-          <a:bodyPr wrap="square" lIns="0" tIns="127000" rIns="101600" bIns="0" rtlCol="0" anchor="ctr"/>
+          <a:bodyPr wrap="square" lIns="88900" tIns="88900" rIns="88900" bIns="88900" rtlCol="0" anchor="ctr"/>
           <a:lstStyle/>
           <a:p>
             <a:pPr algn="l" indent="0" marL="0">
